--- a/p03/A-frame-Boolean-operations.pptx
+++ b/p03/A-frame-Boolean-operations.pptx
@@ -207,7 +207,7 @@
           <a:p>
             <a:fld id="{FA1E3CD0-6E24-4AC0-945A-82AEC1490673}" type="datetimeFigureOut">
               <a:rPr lang="en-US" smtClean="0"/>
-              <a:t>5/20/2026</a:t>
+              <a:t>10/7/2026</a:t>
             </a:fld>
             <a:endParaRPr lang="en-US"/>
           </a:p>
@@ -474,6 +474,101 @@
 </p:notesMaster>
 </file>
 
+<file path=ppt/notesSlides/notesSlide1.xml><?xml version="1.0" encoding="utf-8"?>
+<p:notes xmlns:a="http://schemas.openxmlformats.org/drawingml/2006/main" xmlns:r="http://schemas.openxmlformats.org/officeDocument/2006/relationships" xmlns:p="http://schemas.openxmlformats.org/presentationml/2006/main">
+  <p:cSld>
+    <p:spTree>
+      <p:nvGrpSpPr>
+        <p:cNvPr id="1" name=""/>
+        <p:cNvGrpSpPr/>
+        <p:nvPr/>
+      </p:nvGrpSpPr>
+      <p:grpSpPr>
+        <a:xfrm>
+          <a:off x="0" y="0"/>
+          <a:ext cx="0" cy="0"/>
+          <a:chOff x="0" y="0"/>
+          <a:chExt cx="0" cy="0"/>
+        </a:xfrm>
+      </p:grpSpPr>
+      <p:sp>
+        <p:nvSpPr>
+          <p:cNvPr id="2" name="Slide Image Placeholder 1"/>
+          <p:cNvSpPr>
+            <a:spLocks noGrp="1" noRot="1" noChangeAspect="1"/>
+          </p:cNvSpPr>
+          <p:nvPr>
+            <p:ph type="sldImg"/>
+          </p:nvPr>
+        </p:nvSpPr>
+        <p:spPr/>
+      </p:sp>
+      <p:sp>
+        <p:nvSpPr>
+          <p:cNvPr id="3" name="Notes Placeholder 2"/>
+          <p:cNvSpPr>
+            <a:spLocks noGrp="1"/>
+          </p:cNvSpPr>
+          <p:nvPr>
+            <p:ph type="body" idx="1"/>
+          </p:nvPr>
+        </p:nvSpPr>
+        <p:spPr/>
+        <p:txBody>
+          <a:bodyPr/>
+          <a:lstStyle/>
+          <a:p>
+            <a:r>
+              <a:rPr lang="en-US" dirty="0"/>
+              <a:t>CYMK red is Magenta + Yellow = FF-00-FF </a:t>
+            </a:r>
+            <a:r>
+              <a:rPr lang="en-US" dirty="0" err="1"/>
+              <a:t>xor</a:t>
+            </a:r>
+            <a:r>
+              <a:rPr lang="en-US" dirty="0"/>
+              <a:t> FF-FF-00 </a:t>
+            </a:r>
+          </a:p>
+        </p:txBody>
+      </p:sp>
+      <p:sp>
+        <p:nvSpPr>
+          <p:cNvPr id="4" name="Slide Number Placeholder 3"/>
+          <p:cNvSpPr>
+            <a:spLocks noGrp="1"/>
+          </p:cNvSpPr>
+          <p:nvPr>
+            <p:ph type="sldNum" sz="quarter" idx="5"/>
+          </p:nvPr>
+        </p:nvSpPr>
+        <p:spPr/>
+        <p:txBody>
+          <a:bodyPr/>
+          <a:lstStyle/>
+          <a:p>
+            <a:fld id="{9BA6B424-CA33-4A3E-9131-9279D1BF9385}" type="slidenum">
+              <a:rPr lang="en-US" smtClean="0"/>
+              <a:t>4</a:t>
+            </a:fld>
+            <a:endParaRPr lang="en-US"/>
+          </a:p>
+        </p:txBody>
+      </p:sp>
+    </p:spTree>
+    <p:extLst>
+      <p:ext uri="{BB962C8B-B14F-4D97-AF65-F5344CB8AC3E}">
+        <p14:creationId xmlns:p14="http://schemas.microsoft.com/office/powerpoint/2010/main" val="1596460943"/>
+      </p:ext>
+    </p:extLst>
+  </p:cSld>
+  <p:clrMapOvr>
+    <a:masterClrMapping/>
+  </p:clrMapOvr>
+</p:notes>
+</file>
+
 <file path=ppt/slideLayouts/slideLayout1.xml><?xml version="1.0" encoding="utf-8"?>
 <p:sldLayout xmlns:a="http://schemas.openxmlformats.org/drawingml/2006/main" xmlns:r="http://schemas.openxmlformats.org/officeDocument/2006/relationships" xmlns:p="http://schemas.openxmlformats.org/presentationml/2006/main" type="title" preserve="1">
   <p:cSld name="Title Slide">
@@ -605,7 +700,7 @@
           <a:p>
             <a:fld id="{846CE7D5-CF57-46EF-B807-FDD0502418D4}" type="datetimeFigureOut">
               <a:rPr lang="en-US" smtClean="0"/>
-              <a:t>5/20/2026</a:t>
+              <a:t>10/7/2026</a:t>
             </a:fld>
             <a:endParaRPr lang="en-US"/>
           </a:p>
@@ -775,7 +870,7 @@
           <a:p>
             <a:fld id="{846CE7D5-CF57-46EF-B807-FDD0502418D4}" type="datetimeFigureOut">
               <a:rPr lang="en-US" smtClean="0"/>
-              <a:t>5/20/2026</a:t>
+              <a:t>10/7/2026</a:t>
             </a:fld>
             <a:endParaRPr lang="en-US"/>
           </a:p>
@@ -955,7 +1050,7 @@
           <a:p>
             <a:fld id="{846CE7D5-CF57-46EF-B807-FDD0502418D4}" type="datetimeFigureOut">
               <a:rPr lang="en-US" smtClean="0"/>
-              <a:t>5/20/2026</a:t>
+              <a:t>10/7/2026</a:t>
             </a:fld>
             <a:endParaRPr lang="en-US"/>
           </a:p>
@@ -1125,7 +1220,7 @@
           <a:p>
             <a:fld id="{846CE7D5-CF57-46EF-B807-FDD0502418D4}" type="datetimeFigureOut">
               <a:rPr lang="en-US" smtClean="0"/>
-              <a:t>5/20/2026</a:t>
+              <a:t>10/7/2026</a:t>
             </a:fld>
             <a:endParaRPr lang="en-US"/>
           </a:p>
@@ -1371,7 +1466,7 @@
           <a:p>
             <a:fld id="{846CE7D5-CF57-46EF-B807-FDD0502418D4}" type="datetimeFigureOut">
               <a:rPr lang="en-US" smtClean="0"/>
-              <a:t>5/20/2026</a:t>
+              <a:t>10/7/2026</a:t>
             </a:fld>
             <a:endParaRPr lang="en-US"/>
           </a:p>
@@ -1603,7 +1698,7 @@
           <a:p>
             <a:fld id="{846CE7D5-CF57-46EF-B807-FDD0502418D4}" type="datetimeFigureOut">
               <a:rPr lang="en-US" smtClean="0"/>
-              <a:t>5/20/2026</a:t>
+              <a:t>10/7/2026</a:t>
             </a:fld>
             <a:endParaRPr lang="en-US"/>
           </a:p>
@@ -1970,7 +2065,7 @@
           <a:p>
             <a:fld id="{846CE7D5-CF57-46EF-B807-FDD0502418D4}" type="datetimeFigureOut">
               <a:rPr lang="en-US" smtClean="0"/>
-              <a:t>5/20/2026</a:t>
+              <a:t>10/7/2026</a:t>
             </a:fld>
             <a:endParaRPr lang="en-US"/>
           </a:p>
@@ -2088,7 +2183,7 @@
           <a:p>
             <a:fld id="{846CE7D5-CF57-46EF-B807-FDD0502418D4}" type="datetimeFigureOut">
               <a:rPr lang="en-US" smtClean="0"/>
-              <a:t>5/20/2026</a:t>
+              <a:t>10/7/2026</a:t>
             </a:fld>
             <a:endParaRPr lang="en-US"/>
           </a:p>
@@ -2183,7 +2278,7 @@
           <a:p>
             <a:fld id="{846CE7D5-CF57-46EF-B807-FDD0502418D4}" type="datetimeFigureOut">
               <a:rPr lang="en-US" smtClean="0"/>
-              <a:t>5/20/2026</a:t>
+              <a:t>10/7/2026</a:t>
             </a:fld>
             <a:endParaRPr lang="en-US"/>
           </a:p>
@@ -2460,7 +2555,7 @@
           <a:p>
             <a:fld id="{846CE7D5-CF57-46EF-B807-FDD0502418D4}" type="datetimeFigureOut">
               <a:rPr lang="en-US" smtClean="0"/>
-              <a:t>5/20/2026</a:t>
+              <a:t>10/7/2026</a:t>
             </a:fld>
             <a:endParaRPr lang="en-US"/>
           </a:p>
@@ -2717,7 +2812,7 @@
           <a:p>
             <a:fld id="{846CE7D5-CF57-46EF-B807-FDD0502418D4}" type="datetimeFigureOut">
               <a:rPr lang="en-US" smtClean="0"/>
-              <a:t>5/20/2026</a:t>
+              <a:t>10/7/2026</a:t>
             </a:fld>
             <a:endParaRPr lang="en-US"/>
           </a:p>
@@ -2930,7 +3025,7 @@
           <a:p>
             <a:fld id="{846CE7D5-CF57-46EF-B807-FDD0502418D4}" type="datetimeFigureOut">
               <a:rPr lang="en-US" smtClean="0"/>
-              <a:t>5/20/2026</a:t>
+              <a:t>10/7/2026</a:t>
             </a:fld>
             <a:endParaRPr lang="en-US"/>
           </a:p>
@@ -5145,13 +5240,13 @@
         </p:nvSpPr>
         <p:spPr>
           <a:xfrm>
-            <a:off x="838200" y="1825624"/>
-            <a:ext cx="10515600" cy="4575175"/>
+            <a:off x="838200" y="1545466"/>
+            <a:ext cx="10515600" cy="4855334"/>
           </a:xfrm>
         </p:spPr>
         <p:txBody>
           <a:bodyPr>
-            <a:normAutofit fontScale="92500" lnSpcReduction="10000"/>
+            <a:normAutofit lnSpcReduction="10000"/>
           </a:bodyPr>
           <a:lstStyle/>
           <a:p>
@@ -5180,12 +5275,9 @@
             </a:r>
           </a:p>
           <a:p>
-            <a:pPr marL="0" indent="0">
-              <a:buNone/>
-            </a:pPr>
             <a:r>
               <a:rPr lang="en-US" dirty="0"/>
-              <a:t>	Red: color=“</a:t>
+              <a:t>	Red: color="</a:t>
             </a:r>
             <a:r>
               <a:rPr lang="en-US" dirty="0">
@@ -5197,7 +5289,7 @@
             </a:r>
             <a:r>
               <a:rPr lang="en-US" dirty="0"/>
-              <a:t>0000”, blue: color=“00</a:t>
+              <a:t>0000", blue: color="0000</a:t>
             </a:r>
             <a:r>
               <a:rPr lang="en-US" dirty="0">
@@ -5209,7 +5301,7 @@
             </a:r>
             <a:r>
               <a:rPr lang="en-US" dirty="0"/>
-              <a:t>00”</a:t>
+              <a:t>"</a:t>
             </a:r>
           </a:p>
           <a:p>
@@ -5244,17 +5336,22 @@
               <a:buNone/>
             </a:pPr>
             <a:r>
+              <a:rPr lang="en-US" b="1" dirty="0">
+                <a:solidFill>
+                  <a:srgbClr val="00FFFF"/>
+                </a:solidFill>
+              </a:rPr>
+              <a:t>Cyan</a:t>
+            </a:r>
+            <a:r>
               <a:rPr lang="en-US" dirty="0"/>
-              <a:t>Cyan – absorbs red and reflects green and blue</a:t>
-            </a:r>
-          </a:p>
-          <a:p>
-            <a:pPr marL="0" indent="0">
-              <a:buNone/>
-            </a:pPr>
+              <a:t> – absorbs red and reflects green and blue</a:t>
+            </a:r>
+          </a:p>
+          <a:p>
             <a:r>
               <a:rPr lang="en-US" dirty="0"/>
-              <a:t>	color=“#</a:t>
+              <a:t>	color="#</a:t>
             </a:r>
             <a:r>
               <a:rPr lang="en-US" dirty="0">
@@ -5282,7 +5379,7 @@
             </a:r>
             <a:r>
               <a:rPr lang="en-US" dirty="0"/>
-              <a:t>”</a:t>
+              <a:t>"</a:t>
             </a:r>
           </a:p>
           <a:p>
@@ -5290,17 +5387,22 @@
               <a:buNone/>
             </a:pPr>
             <a:r>
+              <a:rPr lang="en-US" b="1" dirty="0">
+                <a:solidFill>
+                  <a:srgbClr val="7030A0"/>
+                </a:solidFill>
+              </a:rPr>
+              <a:t>Magenta</a:t>
+            </a:r>
+            <a:r>
               <a:rPr lang="en-US" dirty="0"/>
-              <a:t>Magenta – absorbs green and reflects red and blue</a:t>
-            </a:r>
-          </a:p>
-          <a:p>
-            <a:pPr marL="0" indent="0">
-              <a:buNone/>
-            </a:pPr>
+              <a:t> – absorbs green and reflects red and blue</a:t>
+            </a:r>
+          </a:p>
+          <a:p>
             <a:r>
               <a:rPr lang="en-US" dirty="0"/>
-              <a:t>	color=“#</a:t>
+              <a:t>	color="#</a:t>
             </a:r>
             <a:r>
               <a:rPr lang="en-US" dirty="0">
@@ -5328,7 +5430,7 @@
             </a:r>
             <a:r>
               <a:rPr lang="en-US" dirty="0"/>
-              <a:t>”</a:t>
+              <a:t>"</a:t>
             </a:r>
           </a:p>
           <a:p>
@@ -5336,17 +5438,25 @@
               <a:buNone/>
             </a:pPr>
             <a:r>
+              <a:rPr lang="en-US" b="1" dirty="0">
+                <a:solidFill>
+                  <a:srgbClr val="FFFF00"/>
+                </a:solidFill>
+                <a:highlight>
+                  <a:srgbClr val="000000"/>
+                </a:highlight>
+              </a:rPr>
+              <a:t>Yellow</a:t>
+            </a:r>
+            <a:r>
               <a:rPr lang="en-US" dirty="0"/>
-              <a:t>Yellow – absorbs blue and reflects red and green</a:t>
-            </a:r>
-          </a:p>
-          <a:p>
-            <a:pPr marL="0" indent="0">
-              <a:buNone/>
-            </a:pPr>
+              <a:t> – absorbs blue and reflects red and green</a:t>
+            </a:r>
+          </a:p>
+          <a:p>
             <a:r>
               <a:rPr lang="en-US" dirty="0"/>
-              <a:t>	color=“#</a:t>
+              <a:t>	color="#</a:t>
             </a:r>
             <a:r>
               <a:rPr lang="en-US" dirty="0">
@@ -5374,7 +5484,7 @@
             </a:r>
             <a:r>
               <a:rPr lang="en-US" dirty="0"/>
-              <a:t>”</a:t>
+              <a:t>"</a:t>
             </a:r>
           </a:p>
         </p:txBody>
@@ -5641,7 +5751,7 @@
             </a:pPr>
             <a:r>
               <a:rPr lang="en-US" dirty="0"/>
-              <a:t>&lt;a-box position="-1   0.5   -3" rotation="0 45 0" color=“red"&gt;&lt;/a-box&gt;</a:t>
+              <a:t>&lt;a-box position="-1   0.5   -3" rotation="0 45 0" color="red"&gt;&lt;/a-box&gt;</a:t>
             </a:r>
           </a:p>
           <a:p>
@@ -5656,7 +5766,7 @@
             </a:pPr>
             <a:r>
               <a:rPr lang="en-US" dirty="0"/>
-              <a:t>&lt;a-sphere position="0   1.25   -5" radius="1.25" color=“blue“&gt;&lt;/a-sphere&gt;</a:t>
+              <a:t>&lt;a-sphere position="0   1.25   -5" radius="1.25" color="blue"&gt;&lt;/a-sphere&gt;</a:t>
             </a:r>
           </a:p>
           <a:p>
@@ -5719,7 +5829,7 @@
             </a:pPr>
             <a:r>
               <a:rPr lang="en-US" dirty="0"/>
-              <a:t>	color=“3cb371"&gt;&lt;/a-plane&gt;</a:t>
+              <a:t>	color="3cb371"&gt;&lt;/a-plane&gt;</a:t>
             </a:r>
           </a:p>
         </p:txBody>

--- a/p03/A-frame-Boolean-operations.pptx
+++ b/p03/A-frame-Boolean-operations.pptx
@@ -207,7 +207,7 @@
           <a:p>
             <a:fld id="{FA1E3CD0-6E24-4AC0-945A-82AEC1490673}" type="datetimeFigureOut">
               <a:rPr lang="en-US" smtClean="0"/>
-              <a:t>10/7/2026</a:t>
+              <a:t>10/8/2026</a:t>
             </a:fld>
             <a:endParaRPr lang="en-US"/>
           </a:p>
@@ -700,7 +700,7 @@
           <a:p>
             <a:fld id="{846CE7D5-CF57-46EF-B807-FDD0502418D4}" type="datetimeFigureOut">
               <a:rPr lang="en-US" smtClean="0"/>
-              <a:t>10/7/2026</a:t>
+              <a:t>10/8/2026</a:t>
             </a:fld>
             <a:endParaRPr lang="en-US"/>
           </a:p>
@@ -870,7 +870,7 @@
           <a:p>
             <a:fld id="{846CE7D5-CF57-46EF-B807-FDD0502418D4}" type="datetimeFigureOut">
               <a:rPr lang="en-US" smtClean="0"/>
-              <a:t>10/7/2026</a:t>
+              <a:t>10/8/2026</a:t>
             </a:fld>
             <a:endParaRPr lang="en-US"/>
           </a:p>
@@ -1050,7 +1050,7 @@
           <a:p>
             <a:fld id="{846CE7D5-CF57-46EF-B807-FDD0502418D4}" type="datetimeFigureOut">
               <a:rPr lang="en-US" smtClean="0"/>
-              <a:t>10/7/2026</a:t>
+              <a:t>10/8/2026</a:t>
             </a:fld>
             <a:endParaRPr lang="en-US"/>
           </a:p>
@@ -1220,7 +1220,7 @@
           <a:p>
             <a:fld id="{846CE7D5-CF57-46EF-B807-FDD0502418D4}" type="datetimeFigureOut">
               <a:rPr lang="en-US" smtClean="0"/>
-              <a:t>10/7/2026</a:t>
+              <a:t>10/8/2026</a:t>
             </a:fld>
             <a:endParaRPr lang="en-US"/>
           </a:p>
@@ -1466,7 +1466,7 @@
           <a:p>
             <a:fld id="{846CE7D5-CF57-46EF-B807-FDD0502418D4}" type="datetimeFigureOut">
               <a:rPr lang="en-US" smtClean="0"/>
-              <a:t>10/7/2026</a:t>
+              <a:t>10/8/2026</a:t>
             </a:fld>
             <a:endParaRPr lang="en-US"/>
           </a:p>
@@ -1698,7 +1698,7 @@
           <a:p>
             <a:fld id="{846CE7D5-CF57-46EF-B807-FDD0502418D4}" type="datetimeFigureOut">
               <a:rPr lang="en-US" smtClean="0"/>
-              <a:t>10/7/2026</a:t>
+              <a:t>10/8/2026</a:t>
             </a:fld>
             <a:endParaRPr lang="en-US"/>
           </a:p>
@@ -2065,7 +2065,7 @@
           <a:p>
             <a:fld id="{846CE7D5-CF57-46EF-B807-FDD0502418D4}" type="datetimeFigureOut">
               <a:rPr lang="en-US" smtClean="0"/>
-              <a:t>10/7/2026</a:t>
+              <a:t>10/8/2026</a:t>
             </a:fld>
             <a:endParaRPr lang="en-US"/>
           </a:p>
@@ -2183,7 +2183,7 @@
           <a:p>
             <a:fld id="{846CE7D5-CF57-46EF-B807-FDD0502418D4}" type="datetimeFigureOut">
               <a:rPr lang="en-US" smtClean="0"/>
-              <a:t>10/7/2026</a:t>
+              <a:t>10/8/2026</a:t>
             </a:fld>
             <a:endParaRPr lang="en-US"/>
           </a:p>
@@ -2278,7 +2278,7 @@
           <a:p>
             <a:fld id="{846CE7D5-CF57-46EF-B807-FDD0502418D4}" type="datetimeFigureOut">
               <a:rPr lang="en-US" smtClean="0"/>
-              <a:t>10/7/2026</a:t>
+              <a:t>10/8/2026</a:t>
             </a:fld>
             <a:endParaRPr lang="en-US"/>
           </a:p>
@@ -2555,7 +2555,7 @@
           <a:p>
             <a:fld id="{846CE7D5-CF57-46EF-B807-FDD0502418D4}" type="datetimeFigureOut">
               <a:rPr lang="en-US" smtClean="0"/>
-              <a:t>10/7/2026</a:t>
+              <a:t>10/8/2026</a:t>
             </a:fld>
             <a:endParaRPr lang="en-US"/>
           </a:p>
@@ -2812,7 +2812,7 @@
           <a:p>
             <a:fld id="{846CE7D5-CF57-46EF-B807-FDD0502418D4}" type="datetimeFigureOut">
               <a:rPr lang="en-US" smtClean="0"/>
-              <a:t>10/7/2026</a:t>
+              <a:t>10/8/2026</a:t>
             </a:fld>
             <a:endParaRPr lang="en-US"/>
           </a:p>
@@ -3025,7 +3025,7 @@
           <a:p>
             <a:fld id="{846CE7D5-CF57-46EF-B807-FDD0502418D4}" type="datetimeFigureOut">
               <a:rPr lang="en-US" smtClean="0"/>
-              <a:t>10/7/2026</a:t>
+              <a:t>10/8/2026</a:t>
             </a:fld>
             <a:endParaRPr lang="en-US"/>
           </a:p>
